--- a/tongyeong/통영숙수_광고운영제안서.pptx
+++ b/tongyeong/통영숙수_광고운영제안서.pptx
@@ -130,18 +130,18 @@
   <p:extLst>
     <p:ext uri="{521415D9-36F7-43E2-AB2F-B90AF26B5E84}">
       <p14:sectionLst xmlns:p14="http://schemas.microsoft.com/office/powerpoint/2010/main">
-        <p14:section name="표지" id="{209845f0-c14e-b5b3-007a-fd5cae4e7ceb}">
+        <p14:section name="표지" id="{57369af3-0aa6-5f16-f4cd-3c0542f2c187}">
           <p14:sldIdLst>
             <p14:sldId id="256"/>
             <p14:sldId id="257"/>
           </p14:sldIdLst>
         </p14:section>
-        <p14:section name="요약" id="{e28abcb7-5818-6632-a558-ea86456ad140}">
+        <p14:section name="요약" id="{21b7cb18-d4ce-40f2-009c-59628e8783c1}">
           <p14:sldIdLst>
             <p14:sldId id="258"/>
           </p14:sldIdLst>
         </p14:section>
-        <p14:section name="Ⅰ 현황" id="{3a137719-cd19-8e2b-da1e-9cb8558ad736}">
+        <p14:section name="Ⅰ 현황" id="{0da0bb4f-022f-ecff-1b48-84c71dadebac}">
           <p14:sldIdLst>
             <p14:sldId id="259"/>
             <p14:sldId id="260"/>
@@ -149,14 +149,14 @@
             <p14:sldId id="262"/>
           </p14:sldIdLst>
         </p14:section>
-        <p14:section name="Ⅱ 전략" id="{5958f545-d289-42d0-bfb3-dd6edebb2372}">
+        <p14:section name="Ⅱ 전략" id="{5ae0f9cd-8fd9-da60-d0b9-a64cb3f5a3e9}">
           <p14:sldIdLst>
             <p14:sldId id="263"/>
             <p14:sldId id="264"/>
             <p14:sldId id="265"/>
           </p14:sldIdLst>
         </p14:section>
-        <p14:section name="Ⅲ 운영안" id="{e1b585eb-84cc-6074-03be-2266dec9e2eb}">
+        <p14:section name="Ⅲ 운영안" id="{72c9453a-d659-f838-3eb3-0623dd602fd2}">
           <p14:sldIdLst>
             <p14:sldId id="266"/>
             <p14:sldId id="267"/>
@@ -168,7 +168,7 @@
             <p14:sldId id="273"/>
           </p14:sldIdLst>
         </p14:section>
-        <p14:section name="Ⅳ 예산·일정" id="{181cd3e8-5cfb-2860-4a2c-dd27e1bc9436}">
+        <p14:section name="Ⅳ 예산·일정" id="{5448c690-272b-a67f-8562-c4181b25e87a}">
           <p14:sldIdLst>
             <p14:sldId id="274"/>
             <p14:sldId id="275"/>
@@ -332,7 +332,7 @@
               <a:solidFill>
                 <a:srgbClr val="F08A00"/>
               </a:solidFill>
-              <a:prstDash val="dash,solid"/>
+              <a:prstDash val="dash"/>
               <a:round/>
             </a:ln>
             <a:effectLst/>
@@ -435,7 +435,7 @@
               <a:solidFill>
                 <a:srgbClr val="1568A3"/>
               </a:solidFill>
-              <a:prstDash val="dash,solid"/>
+              <a:prstDash val="dash"/>
               <a:round/>
             </a:ln>
             <a:effectLst/>
@@ -471,7 +471,7 @@
             <c:size val="6"/>
             <c:spPr>
               <a:solidFill>
-                <a:srgbClr val="1568A3"/>
+                <a:srgbClr val="F08A00"/>
               </a:solidFill>
               <a:ln w="9525" cap="flat">
                 <a:solidFill>

--- a/tongyeong/통영숙수_광고운영제안서.pptx
+++ b/tongyeong/통영숙수_광고운영제안서.pptx
@@ -130,18 +130,18 @@
   <p:extLst>
     <p:ext uri="{521415D9-36F7-43E2-AB2F-B90AF26B5E84}">
       <p14:sectionLst xmlns:p14="http://schemas.microsoft.com/office/powerpoint/2010/main">
-        <p14:section name="표지" id="{57369af3-0aa6-5f16-f4cd-3c0542f2c187}">
+        <p14:section name="표지" id="{e01485a6-799c-a021-0775-c8b94454060f}">
           <p14:sldIdLst>
             <p14:sldId id="256"/>
             <p14:sldId id="257"/>
           </p14:sldIdLst>
         </p14:section>
-        <p14:section name="요약" id="{21b7cb18-d4ce-40f2-009c-59628e8783c1}">
+        <p14:section name="요약" id="{5338199a-c20e-06f9-af14-147add0f694f}">
           <p14:sldIdLst>
             <p14:sldId id="258"/>
           </p14:sldIdLst>
         </p14:section>
-        <p14:section name="Ⅰ 현황" id="{0da0bb4f-022f-ecff-1b48-84c71dadebac}">
+        <p14:section name="Ⅰ 현황" id="{765869ff-98cc-0ab7-6017-2dbf2baaa3f9}">
           <p14:sldIdLst>
             <p14:sldId id="259"/>
             <p14:sldId id="260"/>
@@ -149,14 +149,14 @@
             <p14:sldId id="262"/>
           </p14:sldIdLst>
         </p14:section>
-        <p14:section name="Ⅱ 전략" id="{5ae0f9cd-8fd9-da60-d0b9-a64cb3f5a3e9}">
+        <p14:section name="Ⅱ 전략" id="{70f5adcd-3de3-fbe8-c0a1-3ea2d574ae19}">
           <p14:sldIdLst>
             <p14:sldId id="263"/>
             <p14:sldId id="264"/>
             <p14:sldId id="265"/>
           </p14:sldIdLst>
         </p14:section>
-        <p14:section name="Ⅲ 운영안" id="{72c9453a-d659-f838-3eb3-0623dd602fd2}">
+        <p14:section name="Ⅲ 운영안" id="{39d1f17a-2938-bb69-bd27-a0bb22e68a16}">
           <p14:sldIdLst>
             <p14:sldId id="266"/>
             <p14:sldId id="267"/>
@@ -168,7 +168,7 @@
             <p14:sldId id="273"/>
           </p14:sldIdLst>
         </p14:section>
-        <p14:section name="Ⅳ 예산·일정" id="{5448c690-272b-a67f-8562-c4181b25e87a}">
+        <p14:section name="Ⅳ 예산·일정" id="{71a5e84d-1747-d824-56db-e6a6a2c930a3}">
           <p14:sldIdLst>
             <p14:sldId id="274"/>
             <p14:sldId id="275"/>
@@ -194,7 +194,17 @@
   <c:chart>
     <c:autoTitleDeleted val="1"/>
     <c:plotArea>
-      <c:layout/>
+      <c:layout>
+        <c:manualLayout>
+          <c:layoutTarget val="inner"/>
+          <c:xMode val="edge"/>
+          <c:yMode val="edge"/>
+          <c:x val="0.04"/>
+          <c:y val="0.06"/>
+          <c:w val="0.92"/>
+          <c:h val="0.82"/>
+        </c:manualLayout>
+      </c:layout>
       <c:barChart>
         <c:barDir val="col"/>
         <c:grouping val="clustered"/>
@@ -236,7 +246,6 @@
                 </a:pPr>
               </a:p>
             </c:txPr>
-            <c:dLblPos val="outEnd"/>
             <c:showLegendKey val="0"/>
             <c:showVal val="1"/>
             <c:showCatName val="0"/>
@@ -293,7 +302,6 @@
               </a:pPr>
             </a:p>
           </c:txPr>
-          <c:dLblPos val="outEnd"/>
           <c:showLegendKey val="0"/>
           <c:showVal val="1"/>
           <c:showCatName val="0"/>
@@ -308,244 +316,6 @@
         <c:axId val="2094734552"/>
         <c:axId val="2094734556"/>
       </c:barChart>
-      <c:lineChart>
-        <c:varyColors val="0"/>
-        <c:ser>
-          <c:idx val="1"/>
-          <c:order val="1"/>
-          <c:tx>
-            <c:strRef>
-              <c:f>Sheet1!$C$1</c:f>
-              <c:strCache>
-                <c:ptCount val="1"/>
-                <c:pt idx="0">
-                  <c:v>BEP 300%</c:v>
-                </c:pt>
-              </c:strCache>
-            </c:strRef>
-          </c:tx>
-          <c:spPr>
-            <a:solidFill>
-              <a:srgbClr val="F08A00"/>
-            </a:solidFill>
-            <a:ln w="25400" cap="flat">
-              <a:solidFill>
-                <a:srgbClr val="F08A00"/>
-              </a:solidFill>
-              <a:prstDash val="dash"/>
-              <a:round/>
-            </a:ln>
-            <a:effectLst/>
-          </c:spPr>
-          <c:invertIfNegative val="0"/>
-          <c:dLbls>
-            <c:numFmt formatCode="0&quot;%&quot;" sourceLinked="0"/>
-            <c:txPr>
-              <a:bodyPr/>
-              <a:lstStyle/>
-              <a:p>
-                <a:pPr>
-                  <a:defRPr b="1" i="0" strike="noStrike" sz="1300" u="none">
-                    <a:solidFill>
-                      <a:srgbClr val="191F28"/>
-                    </a:solidFill>
-                    <a:latin typeface="+mn-lt"/>
-                  </a:defRPr>
-                </a:pPr>
-              </a:p>
-            </c:txPr>
-            <c:dLblPos val="outEnd"/>
-            <c:showLegendKey val="0"/>
-            <c:showVal val="1"/>
-            <c:showCatName val="0"/>
-            <c:showSerName val="0"/>
-            <c:showPercent val="0"/>
-            <c:showBubbleSize val="0"/>
-            <c:showLeaderLines val="0"/>
-          </c:dLbls>
-          <c:marker>
-            <c:symbol val="none"/>
-            <c:size val="6"/>
-            <c:spPr>
-              <a:solidFill>
-                <a:srgbClr val="1568A3"/>
-              </a:solidFill>
-              <a:ln w="9525" cap="flat">
-                <a:solidFill>
-                  <a:srgbClr val="F08A00"/>
-                </a:solidFill>
-                <a:prstDash val="solid"/>
-                <a:round/>
-              </a:ln>
-              <a:effectLst/>
-            </c:spPr>
-          </c:marker>
-          <c:cat>
-            <c:multiLvlStrRef>
-              <c:f>Sheet1!$A$2:$A$3</c:f>
-              <c:multiLvlStrCache>
-                <c:ptCount val="2"/>
-                <c:lvl>
-                  <c:pt idx="0">
-                    <c:v>3분기 (7~9월)</c:v>
-                  </c:pt>
-                  <c:pt idx="1">
-                    <c:v>10월 1~14일</c:v>
-                  </c:pt>
-                </c:lvl>
-              </c:multiLvlStrCache>
-            </c:multiLvlStrRef>
-          </c:cat>
-          <c:val>
-            <c:numRef>
-              <c:f>Sheet1!$C$2:$C$3</c:f>
-              <c:numCache>
-                <c:formatCode>General</c:formatCode>
-                <c:ptCount val="2"/>
-                <c:pt idx="0">
-                  <c:v>300</c:v>
-                </c:pt>
-                <c:pt idx="1">
-                  <c:v>300</c:v>
-                </c:pt>
-              </c:numCache>
-            </c:numRef>
-          </c:val>
-          <c:smooth val="0"/>
-        </c:ser>
-        <c:ser>
-          <c:idx val="2"/>
-          <c:order val="2"/>
-          <c:tx>
-            <c:strRef>
-              <c:f>Sheet1!$D$1</c:f>
-              <c:strCache>
-                <c:ptCount val="1"/>
-                <c:pt idx="0">
-                  <c:v>목표 450%</c:v>
-                </c:pt>
-              </c:strCache>
-            </c:strRef>
-          </c:tx>
-          <c:spPr>
-            <a:solidFill>
-              <a:srgbClr val="1568A3"/>
-            </a:solidFill>
-            <a:ln w="25400" cap="flat">
-              <a:solidFill>
-                <a:srgbClr val="1568A3"/>
-              </a:solidFill>
-              <a:prstDash val="dash"/>
-              <a:round/>
-            </a:ln>
-            <a:effectLst/>
-          </c:spPr>
-          <c:invertIfNegative val="0"/>
-          <c:dLbls>
-            <c:numFmt formatCode="0&quot;%&quot;" sourceLinked="0"/>
-            <c:txPr>
-              <a:bodyPr/>
-              <a:lstStyle/>
-              <a:p>
-                <a:pPr>
-                  <a:defRPr b="1" i="0" strike="noStrike" sz="1300" u="none">
-                    <a:solidFill>
-                      <a:srgbClr val="191F28"/>
-                    </a:solidFill>
-                    <a:latin typeface="+mn-lt"/>
-                  </a:defRPr>
-                </a:pPr>
-              </a:p>
-            </c:txPr>
-            <c:dLblPos val="outEnd"/>
-            <c:showLegendKey val="0"/>
-            <c:showVal val="1"/>
-            <c:showCatName val="0"/>
-            <c:showSerName val="0"/>
-            <c:showPercent val="0"/>
-            <c:showBubbleSize val="0"/>
-            <c:showLeaderLines val="0"/>
-          </c:dLbls>
-          <c:marker>
-            <c:symbol val="none"/>
-            <c:size val="6"/>
-            <c:spPr>
-              <a:solidFill>
-                <a:srgbClr val="F08A00"/>
-              </a:solidFill>
-              <a:ln w="9525" cap="flat">
-                <a:solidFill>
-                  <a:srgbClr val="1568A3"/>
-                </a:solidFill>
-                <a:prstDash val="solid"/>
-                <a:round/>
-              </a:ln>
-              <a:effectLst/>
-            </c:spPr>
-          </c:marker>
-          <c:cat>
-            <c:multiLvlStrRef>
-              <c:f>Sheet1!$A$2:$A$3</c:f>
-              <c:multiLvlStrCache>
-                <c:ptCount val="2"/>
-                <c:lvl>
-                  <c:pt idx="0">
-                    <c:v>3분기 (7~9월)</c:v>
-                  </c:pt>
-                  <c:pt idx="1">
-                    <c:v>10월 1~14일</c:v>
-                  </c:pt>
-                </c:lvl>
-              </c:multiLvlStrCache>
-            </c:multiLvlStrRef>
-          </c:cat>
-          <c:val>
-            <c:numRef>
-              <c:f>Sheet1!$D$2:$D$3</c:f>
-              <c:numCache>
-                <c:formatCode>General</c:formatCode>
-                <c:ptCount val="2"/>
-                <c:pt idx="0">
-                  <c:v>450</c:v>
-                </c:pt>
-                <c:pt idx="1">
-                  <c:v>450</c:v>
-                </c:pt>
-              </c:numCache>
-            </c:numRef>
-          </c:val>
-          <c:smooth val="0"/>
-        </c:ser>
-        <c:dLbls>
-          <c:numFmt formatCode="0&quot;%&quot;" sourceLinked="0"/>
-          <c:txPr>
-            <a:bodyPr/>
-            <a:lstStyle/>
-            <a:p>
-              <a:pPr>
-                <a:defRPr b="1" i="0" strike="noStrike" sz="1300" u="none">
-                  <a:solidFill>
-                    <a:srgbClr val="191F28"/>
-                  </a:solidFill>
-                  <a:latin typeface="+mn-lt"/>
-                </a:defRPr>
-              </a:pPr>
-            </a:p>
-          </c:txPr>
-          <c:dLblPos val="outEnd"/>
-          <c:showLegendKey val="0"/>
-          <c:showVal val="1"/>
-          <c:showCatName val="0"/>
-          <c:showSerName val="0"/>
-          <c:showPercent val="0"/>
-          <c:showBubbleSize val="0"/>
-          <c:showLeaderLines val="0"/>
-        </c:dLbls>
-        <c:marker val="1"/>
-        <c:axId val="2094734554"/>
-        <c:axId val="2094734552"/>
-        <c:axId val="2094734556"/>
-      </c:lineChart>
       <c:catAx>
         <c:axId val="2094734554"/>
         <c:scaling>
@@ -636,26 +406,6 @@
         <a:effectLst/>
       </c:spPr>
     </c:plotArea>
-    <c:legend>
-      <c:legendPos val="t"/>
-      <c:overlay val="0"/>
-      <c:txPr>
-        <a:bodyPr/>
-        <a:lstStyle/>
-        <a:p>
-          <a:pPr>
-            <a:defRPr sz="1200">
-              <a:solidFill>
-                <a:srgbClr val="4E5968"/>
-              </a:solidFill>
-              <a:latin typeface="+mn-lt"/>
-              <a:cs typeface="+mn-lt"/>
-            </a:defRPr>
-          </a:pPr>
-          <a:endParaRPr lang="en-US"/>
-        </a:p>
-      </c:txPr>
-    </c:legend>
     <c:plotVisOnly val="1"/>
     <c:dispBlanksAs val="span"/>
   </c:chart>
@@ -31062,6 +30812,124 @@
           </a:graphicData>
         </a:graphic>
       </p:graphicFrame>
+      <p:sp>
+        <p:nvSpPr>
+          <p:cNvPr id="5" name="Shape 2"/>
+          <p:cNvSpPr/>
+          <p:nvPr/>
+        </p:nvSpPr>
+        <p:spPr>
+          <a:xfrm>
+            <a:off x="685800" y="3140781"/>
+            <a:ext cx="5120640" cy="0"/>
+          </a:xfrm>
+          <a:prstGeom prst="line">
+            <a:avLst/>
+          </a:prstGeom>
+          <a:noFill/>
+          <a:ln w="25400">
+            <a:solidFill>
+              <a:srgbClr val="F08A00"/>
+            </a:solidFill>
+            <a:prstDash val="dash"/>
+          </a:ln>
+        </p:spPr>
+      </p:sp>
+      <p:sp>
+        <p:nvSpPr>
+          <p:cNvPr id="6" name="Text 3"/>
+          <p:cNvSpPr txBox="1"/>
+          <p:nvPr/>
+        </p:nvSpPr>
+        <p:spPr>
+          <a:xfrm>
+            <a:off x="4572000" y="2848173"/>
+            <a:ext cx="1234440" cy="256032"/>
+          </a:xfrm>
+          <a:prstGeom prst="rect">
+            <a:avLst/>
+          </a:prstGeom>
+          <a:noFill/>
+          <a:ln/>
+        </p:spPr>
+        <p:txBody>
+          <a:bodyPr wrap="square" lIns="0" tIns="0" rIns="0" bIns="0" rtlCol="0" anchor="t"/>
+          <a:lstStyle/>
+          <a:p>
+            <a:pPr algn="r" indent="0" marL="0">
+              <a:buNone/>
+            </a:pPr>
+            <a:r>
+              <a:rPr lang="en-US" sz="1200" b="1" dirty="0">
+                <a:solidFill>
+                  <a:schemeClr val="accent5"/>
+                </a:solidFill>
+              </a:rPr>
+              <a:t>BEP 300%</a:t>
+            </a:r>
+            <a:endParaRPr lang="en-US" sz="1200" dirty="0"/>
+          </a:p>
+        </p:txBody>
+      </p:sp>
+      <p:sp>
+        <p:nvSpPr>
+          <p:cNvPr id="7" name="Shape 4"/>
+          <p:cNvSpPr/>
+          <p:nvPr/>
+        </p:nvSpPr>
+        <p:spPr>
+          <a:xfrm>
+            <a:off x="685800" y="2106046"/>
+            <a:ext cx="5120640" cy="0"/>
+          </a:xfrm>
+          <a:prstGeom prst="line">
+            <a:avLst/>
+          </a:prstGeom>
+          <a:noFill/>
+          <a:ln w="25400">
+            <a:solidFill>
+              <a:srgbClr val="1568A3"/>
+            </a:solidFill>
+            <a:prstDash val="dash"/>
+          </a:ln>
+        </p:spPr>
+      </p:sp>
+      <p:sp>
+        <p:nvSpPr>
+          <p:cNvPr id="8" name="Text 5"/>
+          <p:cNvSpPr txBox="1"/>
+          <p:nvPr/>
+        </p:nvSpPr>
+        <p:spPr>
+          <a:xfrm>
+            <a:off x="4572000" y="1813438"/>
+            <a:ext cx="1234440" cy="256032"/>
+          </a:xfrm>
+          <a:prstGeom prst="rect">
+            <a:avLst/>
+          </a:prstGeom>
+          <a:noFill/>
+          <a:ln/>
+        </p:spPr>
+        <p:txBody>
+          <a:bodyPr wrap="square" lIns="0" tIns="0" rIns="0" bIns="0" rtlCol="0" anchor="t"/>
+          <a:lstStyle/>
+          <a:p>
+            <a:pPr algn="r" indent="0" marL="0">
+              <a:buNone/>
+            </a:pPr>
+            <a:r>
+              <a:rPr lang="en-US" sz="1200" b="1" dirty="0">
+                <a:solidFill>
+                  <a:schemeClr val="accent1"/>
+                </a:solidFill>
+              </a:rPr>
+              <a:t>목표 450%</a:t>
+            </a:r>
+            <a:endParaRPr lang="en-US" sz="1200" dirty="0"/>
+          </a:p>
+        </p:txBody>
+      </p:sp>
       <p:graphicFrame>
         <p:nvGraphicFramePr>
           <p:cNvPr id="5" name="Table 0"/>
@@ -31988,7 +31856,7 @@
       </p:graphicFrame>
       <p:sp>
         <p:nvSpPr>
-          <p:cNvPr id="6" name="Shape 2"/>
+          <p:cNvPr id="10" name="Shape 6"/>
           <p:cNvSpPr/>
           <p:nvPr/>
         </p:nvSpPr>
@@ -32010,7 +31878,7 @@
       </p:sp>
       <p:sp>
         <p:nvSpPr>
-          <p:cNvPr id="7" name="Text 3"/>
+          <p:cNvPr id="11" name="Text 7"/>
           <p:cNvSpPr txBox="1"/>
           <p:nvPr/>
         </p:nvSpPr>
@@ -32074,7 +31942,7 @@
       </p:sp>
       <p:sp>
         <p:nvSpPr>
-          <p:cNvPr id="8" name="Text 4"/>
+          <p:cNvPr id="12" name="Text 8"/>
           <p:cNvSpPr txBox="1"/>
           <p:nvPr/>
         </p:nvSpPr>
